--- a/rocky-mountain/product-recommendation-template.pptx
+++ b/rocky-mountain/product-recommendation-template.pptx
@@ -601,7 +601,7 @@
           <a:p>
             <a:r>
               <a:rPr lang="en-US" dirty="0"/>
-              <a:t>Proof in users' own voices — put evidence in quotes, not adjectives. Fictional sample quotes; replace with real pilot feedback. Rotating pastel tints.</a:t>
+              <a:t>Proof in users' own voices. Fictional sample quotes.</a:t>
             </a:r>
             <a:endParaRPr lang="en-US" dirty="0"/>
           </a:p>
@@ -689,7 +689,7 @@
           <a:p>
             <a:r>
               <a:rPr lang="en-US" dirty="0"/>
-              <a:t>Name the real risks and the specific mitigation for each. The kill/scale gate at 90 days caps the downside — the most important line.</a:t>
+              <a:t>Name the real risks and specific mitigations. The kill/scale gate caps the downside.</a:t>
             </a:r>
             <a:endParaRPr lang="en-US" dirty="0"/>
           </a:p>
@@ -777,7 +777,7 @@
           <a:p>
             <a:r>
               <a:rPr lang="en-US" dirty="0"/>
-              <a:t>Close by mirroring the cover and restating the ask in one breath: one squad, two partners, a decision by end of Q3. The mint pill is the single call to action.</a:t>
+              <a:t>Close by mirroring the cover and restating the ask in one breath.</a:t>
             </a:r>
             <a:endParaRPr lang="en-US" dirty="0"/>
           </a:p>
@@ -865,7 +865,7 @@
           <a:p>
             <a:r>
               <a:rPr lang="en-US" dirty="0"/>
-              <a:t>Lead with the ask — recommendation decks put the conclusion first. Left card is the recommendation; right column is exactly what approval means.</a:t>
+              <a:t>Lead with the ask — recommendation decks put the conclusion first.</a:t>
             </a:r>
             <a:endParaRPr lang="en-US" dirty="0"/>
           </a:p>
@@ -953,7 +953,7 @@
           <a:p>
             <a:r>
               <a:rPr lang="en-US" dirty="0"/>
-              <a:t>Frame the problem with numbers, not adjectives. These are illustrative sample figures — replace with your own evidence. The photo slot is for context imagery.</a:t>
+              <a:t>Frame the problem with numbers, not adjectives. Illustrative sample figures.</a:t>
             </a:r>
             <a:endParaRPr lang="en-US" dirty="0"/>
           </a:p>
@@ -1041,7 +1041,7 @@
           <a:p>
             <a:r>
               <a:rPr lang="en-US" dirty="0"/>
-              <a:t>The pivot. One idea, lots of air. The recommendation rests on this: the hard part is already done; shipping is the unlock.</a:t>
+              <a:t>The pivot. One idea, lots of air.</a:t>
             </a:r>
             <a:endParaRPr lang="en-US" dirty="0"/>
           </a:p>
@@ -1129,7 +1129,7 @@
           <a:p>
             <a:r>
               <a:rPr lang="en-US" dirty="0"/>
-              <a:t>What we'd build, in three capabilities. Flag the panel as illustrative. The three status colors map to the palette: periwinkle / butter / mint.</a:t>
+              <a:t>What we'd build, in three capabilities. Flag the panel as illustrative.</a:t>
             </a:r>
             <a:endParaRPr lang="en-US" dirty="0"/>
           </a:p>
@@ -1217,7 +1217,7 @@
           <a:p>
             <a:r>
               <a:rPr lang="en-US" dirty="0"/>
-              <a:t>The 'how it works' beat, on the brand's dark surface. The particle field is an abstract hero visual — swap for a product still or diagram if you have one.</a:t>
+              <a:t>The 'how it works' beat. The particle field is an abstract hero — swap for a product still if you have one.</a:t>
             </a:r>
             <a:endParaRPr lang="en-US" dirty="0"/>
           </a:p>
@@ -1305,7 +1305,7 @@
           <a:p>
             <a:r>
               <a:rPr lang="en-US" dirty="0"/>
-              <a:t>Credibility that it works. Sample pilot KPIs — replace with your real ones. Big numbers, muted captions, hairlines: the signature stat layout.</a:t>
+              <a:t>Credibility that it works. Sample pilot KPIs — replace with real ones.</a:t>
             </a:r>
             <a:endParaRPr lang="en-US" dirty="0"/>
           </a:p>
@@ -1393,7 +1393,7 @@
           <a:p>
             <a:r>
               <a:rPr lang="en-US" dirty="0"/>
-              <a:t>Show the decision was considered. Three honest options, four comparison rows. The recommended path is the mint card.</a:t>
+              <a:t>Show the decision was considered. The recommended path is the mint card.</a:t>
             </a:r>
             <a:endParaRPr lang="en-US" dirty="0"/>
           </a:p>
@@ -1481,7 +1481,7 @@
           <a:p>
             <a:r>
               <a:rPr lang="en-US" dirty="0"/>
-              <a:t>The plan, four steps, with a real gate at the pilot (step 2). We don't roll out until the pilot clears its metrics.</a:t>
+              <a:t>Four steps, with a real gate at the pilot (step 2).</a:t>
             </a:r>
             <a:endParaRPr lang="en-US" dirty="0"/>
           </a:p>
@@ -1883,7 +1883,7 @@
         <p:spPr>
           <a:xfrm>
             <a:off x="1088136" y="402336"/>
-            <a:ext cx="3657600" cy="365760"/>
+            <a:ext cx="4114800" cy="365760"/>
           </a:xfrm>
           <a:prstGeom prst="rect">
             <a:avLst/>
@@ -2800,7 +2800,7 @@
         <p:spPr>
           <a:xfrm>
             <a:off x="777240" y="6419088"/>
-            <a:ext cx="6400800" cy="274320"/>
+            <a:ext cx="7315200" cy="274320"/>
           </a:xfrm>
           <a:prstGeom prst="rect">
             <a:avLst/>
@@ -3501,7 +3501,7 @@
         <p:spPr>
           <a:xfrm>
             <a:off x="777240" y="6419088"/>
-            <a:ext cx="6400800" cy="274320"/>
+            <a:ext cx="7315200" cy="274320"/>
           </a:xfrm>
           <a:prstGeom prst="rect">
             <a:avLst/>
@@ -3631,7 +3631,7 @@
         <p:spPr>
           <a:xfrm>
             <a:off x="1088136" y="402336"/>
-            <a:ext cx="3657600" cy="365760"/>
+            <a:ext cx="4114800" cy="365760"/>
           </a:xfrm>
           <a:prstGeom prst="rect">
             <a:avLst/>
@@ -4734,7 +4734,7 @@
         <p:spPr>
           <a:xfrm>
             <a:off x="777240" y="6419088"/>
-            <a:ext cx="6400800" cy="274320"/>
+            <a:ext cx="7315200" cy="274320"/>
           </a:xfrm>
           <a:prstGeom prst="rect">
             <a:avLst/>
@@ -5345,7 +5345,7 @@
         <p:spPr>
           <a:xfrm>
             <a:off x="777240" y="6419088"/>
-            <a:ext cx="6400800" cy="274320"/>
+            <a:ext cx="7315200" cy="274320"/>
           </a:xfrm>
           <a:prstGeom prst="rect">
             <a:avLst/>
@@ -5652,7 +5652,7 @@
         <p:spPr>
           <a:xfrm>
             <a:off x="777240" y="6419088"/>
-            <a:ext cx="6400800" cy="274320"/>
+            <a:ext cx="7315200" cy="274320"/>
           </a:xfrm>
           <a:prstGeom prst="rect">
             <a:avLst/>
@@ -6236,7 +6236,7 @@
         <p:spPr>
           <a:xfrm>
             <a:off x="7589520" y="3017520"/>
-            <a:ext cx="2011680" cy="658368"/>
+            <a:ext cx="2176272" cy="658368"/>
           </a:xfrm>
           <a:prstGeom prst="rect">
             <a:avLst/>
@@ -6356,7 +6356,7 @@
         <p:spPr>
           <a:xfrm>
             <a:off x="7589520" y="3840480"/>
-            <a:ext cx="2011680" cy="658368"/>
+            <a:ext cx="2176272" cy="658368"/>
           </a:xfrm>
           <a:prstGeom prst="rect">
             <a:avLst/>
@@ -6476,7 +6476,7 @@
         <p:spPr>
           <a:xfrm>
             <a:off x="7589520" y="4663440"/>
-            <a:ext cx="2011680" cy="658368"/>
+            <a:ext cx="2176272" cy="658368"/>
           </a:xfrm>
           <a:prstGeom prst="rect">
             <a:avLst/>
@@ -6593,7 +6593,7 @@
         <p:spPr>
           <a:xfrm>
             <a:off x="777240" y="6419088"/>
-            <a:ext cx="6400800" cy="274320"/>
+            <a:ext cx="7315200" cy="274320"/>
           </a:xfrm>
           <a:prstGeom prst="rect">
             <a:avLst/>
@@ -7283,7 +7283,7 @@
         <p:spPr>
           <a:xfrm>
             <a:off x="777240" y="6419088"/>
-            <a:ext cx="6400800" cy="274320"/>
+            <a:ext cx="7315200" cy="274320"/>
           </a:xfrm>
           <a:prstGeom prst="rect">
             <a:avLst/>
@@ -8061,7 +8061,7 @@
         <p:spPr>
           <a:xfrm>
             <a:off x="777240" y="6419088"/>
-            <a:ext cx="6400800" cy="274320"/>
+            <a:ext cx="7315200" cy="274320"/>
           </a:xfrm>
           <a:prstGeom prst="rect">
             <a:avLst/>
@@ -9429,7 +9429,7 @@
         <p:spPr>
           <a:xfrm>
             <a:off x="777240" y="6419088"/>
-            <a:ext cx="6400800" cy="274320"/>
+            <a:ext cx="7315200" cy="274320"/>
           </a:xfrm>
           <a:prstGeom prst="rect">
             <a:avLst/>
@@ -10535,7 +10535,7 @@
         <p:spPr>
           <a:xfrm>
             <a:off x="777240" y="6419088"/>
-            <a:ext cx="6400800" cy="274320"/>
+            <a:ext cx="7315200" cy="274320"/>
           </a:xfrm>
           <a:prstGeom prst="rect">
             <a:avLst/>
